--- a/情感图像生成_项目介绍.pptx
+++ b/情感图像生成_项目介绍.pptx
@@ -6113,137 +6113,61 @@
                 <a:spcPts val="1200"/>
               </a:spcBef>
               <a:spcAft>
-                <a:spcPts val="600"/>
+                <a:spcPts val="800"/>
               </a:spcAft>
-              <a:defRPr sz="2000">
+              <a:defRPr sz="1800">
                 <a:solidFill>
                   <a:srgbClr val="2C3E50"/>
                 </a:solidFill>
               </a:defRPr>
             </a:pPr>
             <a:r>
-              <a:rPr dirty="0"/>
-              <a:t>●  </a:t>
-            </a:r>
-            <a:r>
-              <a:rPr dirty="0" err="1"/>
-              <a:t>绘画是一种非语言的表达方式，能够帮助人们外化内在的感受、想象和情绪状态</a:t>
+              <a:t>●  绘画作为投射媒介：非语言表达方式能够外化内在感受与情绪，是心理投射理论的经典应用载体</a:t>
             </a:r>
             <a:endParaRPr dirty="0"/>
           </a:p>
           <a:p>
             <a:pPr>
-              <a:spcBef>
-                <a:spcPts val="1200"/>
-              </a:spcBef>
               <a:spcAft>
-                <a:spcPts val="600"/>
+                <a:spcPts val="800"/>
               </a:spcAft>
-              <a:defRPr sz="2000">
-                <a:solidFill>
-                  <a:srgbClr val="2C3E50"/>
-                </a:solidFill>
-              </a:defRPr>
-            </a:pPr>
-            <a:r>
-              <a:rPr dirty="0"/>
-              <a:t>●  </a:t>
-            </a:r>
-            <a:r>
-              <a:rPr dirty="0" err="1"/>
-              <a:t>传统「雨中人</a:t>
-            </a:r>
-            <a:r>
-              <a:rPr dirty="0"/>
-              <a:t>」(Draw-A-Person-in-the-Rain, DAPR) </a:t>
-            </a:r>
-            <a:r>
-              <a:rPr dirty="0" err="1"/>
-              <a:t>绘画测验源于临床投射理论，但科学效度存在广泛争议</a:t>
-            </a:r>
-            <a:endParaRPr dirty="0"/>
-          </a:p>
-          <a:p>
-            <a:pPr>
-              <a:spcBef>
-                <a:spcPts val="1200"/>
-              </a:spcBef>
+              <a:defRPr sz="1800"/>
+            </a:pPr>
+            <a:r>
+              <a:t>●  从诊断到表达：传统「雨中人」(DAPR) 测验源于临床投射理论，本项目将其重新定位为表达性艺术媒介，剥离诊断框架，保留投射内核</a:t>
+            </a:r>
+          </a:p>
+          <a:p>
+            <a:pPr>
               <a:spcAft>
-                <a:spcPts val="600"/>
+                <a:spcPts val="800"/>
               </a:spcAft>
-              <a:defRPr sz="2000">
-                <a:solidFill>
-                  <a:srgbClr val="2C3E50"/>
-                </a:solidFill>
-              </a:defRPr>
-            </a:pPr>
-            <a:r>
-              <a:rPr dirty="0"/>
-              <a:t>●  </a:t>
-            </a:r>
-            <a:r>
-              <a:rPr dirty="0" err="1"/>
-              <a:t>现有AI情绪分析工具多偏向临床诊断化解读，存在过度病理化、法律风险高的问题</a:t>
-            </a:r>
-            <a:endParaRPr dirty="0"/>
-          </a:p>
-          <a:p>
-            <a:pPr>
-              <a:spcBef>
-                <a:spcPts val="1200"/>
-              </a:spcBef>
+              <a:defRPr sz="1800"/>
+            </a:pPr>
+            <a:r>
+              <a:t>●  现有工具的交互缺口：多为一次性分析输出，缺乏稳定的人机交互闭环——无对话式追问、无用户选择反馈、无依据对话动态生成的条件图像</a:t>
+            </a:r>
+          </a:p>
+          <a:p>
+            <a:pPr>
               <a:spcAft>
-                <a:spcPts val="600"/>
+                <a:spcPts val="800"/>
               </a:spcAft>
-              <a:defRPr sz="2000">
-                <a:solidFill>
-                  <a:srgbClr val="2C3E50"/>
-                </a:solidFill>
-              </a:defRPr>
-            </a:pPr>
-            <a:r>
-              <a:rPr dirty="0"/>
-              <a:t>●  </a:t>
-            </a:r>
-            <a:r>
-              <a:rPr dirty="0" err="1"/>
-              <a:t>大模型时代，多模态理解（图像+视频）与条件图像生成技术的成熟，为情绪的艺术化表达提供了新路径</a:t>
-            </a:r>
-            <a:endParaRPr dirty="0"/>
-          </a:p>
-          <a:p>
-            <a:pPr>
-              <a:spcBef>
-                <a:spcPts val="1200"/>
-              </a:spcBef>
+              <a:defRPr sz="1800"/>
+            </a:pPr>
+            <a:r>
+              <a:t>●  LLM 带来的新可能：上下文理解能力使 LLM 能够依据访谈对话动态生成构图编辑(edit_prompt)与色彩风格(color_prompt)指令；用户从多变体中选择的行为本身，成为情绪投射的重要反馈数据</a:t>
+            </a:r>
+          </a:p>
+          <a:p>
+            <a:pPr>
               <a:spcAft>
-                <a:spcPts val="600"/>
+                <a:spcPts val="800"/>
               </a:spcAft>
-              <a:defRPr sz="2000">
-                <a:solidFill>
-                  <a:srgbClr val="2C3E50"/>
-                </a:solidFill>
-              </a:defRPr>
-            </a:pPr>
-            <a:r>
-              <a:rPr dirty="0"/>
-              <a:t>●  </a:t>
-            </a:r>
-            <a:r>
-              <a:rPr dirty="0" err="1"/>
-              <a:t>核心问题：如何构建一个去临床化的</a:t>
-            </a:r>
-            <a:r>
-              <a:rPr dirty="0"/>
-              <a:t> AI </a:t>
-            </a:r>
-            <a:r>
-              <a:rPr dirty="0" err="1"/>
-              <a:t>情绪探索与艺术表达系统</a:t>
-            </a:r>
-            <a:r>
-              <a:rPr dirty="0"/>
-              <a:t>？</a:t>
+              <a:defRPr sz="1800"/>
+            </a:pPr>
+            <a:r>
+              <a:t>●  核心问题：如何构建一个以投射理论为根基、以对话为方法、以用户选择为反馈、具备专门构造文档系统的可稳定交互情感图像生成系统？</a:t>
             </a:r>
           </a:p>
         </p:txBody>

--- a/情感图像生成_项目介绍.pptx
+++ b/情感图像生成_项目介绍.pptx
@@ -5205,7 +5205,7 @@
         <p:spPr>
           <a:xfrm>
             <a:off x="731520" y="1645920"/>
-            <a:ext cx="10698480" cy="4572000"/>
+            <a:ext cx="10698480" cy="3400931"/>
           </a:xfrm>
           <a:prstGeom prst="rect">
             <a:avLst/>
@@ -5232,8 +5232,46 @@
               </a:defRPr>
             </a:pPr>
             <a:r>
-              <a:t>●  完整的端到端系统：从绘画采集 → 多模态分析 → 自主访谈 → 情感图像生成 → 艺术反馈报告</a:t>
-            </a:r>
+              <a:rPr dirty="0"/>
+              <a:t>●  </a:t>
+            </a:r>
+            <a:r>
+              <a:rPr dirty="0" err="1"/>
+              <a:t>完整的端到端系统：从绘画采集</a:t>
+            </a:r>
+            <a:r>
+              <a:rPr dirty="0"/>
+              <a:t> → </a:t>
+            </a:r>
+            <a:r>
+              <a:rPr dirty="0" err="1"/>
+              <a:t>多模态分析</a:t>
+            </a:r>
+            <a:r>
+              <a:rPr dirty="0"/>
+              <a:t> → </a:t>
+            </a:r>
+            <a:r>
+              <a:rPr dirty="0" err="1"/>
+              <a:t>自主访谈</a:t>
+            </a:r>
+            <a:r>
+              <a:rPr dirty="0"/>
+              <a:t> → </a:t>
+            </a:r>
+            <a:r>
+              <a:rPr dirty="0" err="1"/>
+              <a:t>情感图像生成</a:t>
+            </a:r>
+            <a:r>
+              <a:rPr dirty="0"/>
+              <a:t> → </a:t>
+            </a:r>
+            <a:r>
+              <a:rPr dirty="0" err="1"/>
+              <a:t>艺术反馈报告</a:t>
+            </a:r>
+            <a:endParaRPr dirty="0"/>
           </a:p>
           <a:p>
             <a:pPr>
@@ -5250,8 +5288,14 @@
               </a:defRPr>
             </a:pPr>
             <a:r>
-              <a:t>●  双模型安全架构落地：本地Qwen3.5 VLM + 云端Kimi-K2.5 LLM，原始敏感数据零上云</a:t>
-            </a:r>
+              <a:rPr dirty="0"/>
+              <a:t>●  双模型安全架构落地：本地Qwen3.5 VLM + 云端Kimi-K2.5 </a:t>
+            </a:r>
+            <a:r>
+              <a:rPr dirty="0" err="1"/>
+              <a:t>LLM，原始敏感数据零上云</a:t>
+            </a:r>
+            <a:endParaRPr dirty="0"/>
           </a:p>
           <a:p>
             <a:pPr>
@@ -5268,6 +5312,7 @@
               </a:defRPr>
             </a:pPr>
             <a:r>
+              <a:rPr dirty="0"/>
               <a:t>●  100%结构化输出保障：lm-format-enforcer约束解码，彻底消除JSON格式崩坏</a:t>
             </a:r>
           </a:p>
@@ -5286,7 +5331,16 @@
               </a:defRPr>
             </a:pPr>
             <a:r>
-              <a:t>●  端侧推理优化：RTX 5060 8GB笔记本GPU即可流畅运行VLM分析+FLUX.2图像生成</a:t>
+              <a:rPr dirty="0"/>
+              <a:t>●  </a:t>
+            </a:r>
+            <a:r>
+              <a:rPr dirty="0" err="1"/>
+              <a:t>端侧推理优化：RTX</a:t>
+            </a:r>
+            <a:r>
+              <a:rPr dirty="0"/>
+              <a:t> 5060 8GB笔记本GPU即可流畅运行VLM分析+FLUX.2图像生成</a:t>
             </a:r>
           </a:p>
           <a:p>
@@ -5304,8 +5358,22 @@
               </a:defRPr>
             </a:pPr>
             <a:r>
-              <a:t>●  Agent架构重构完成：Tool Registry + Plan Engine + Orchestrator，支持失败恢复与状态持久化</a:t>
-            </a:r>
+              <a:rPr dirty="0"/>
+              <a:t>●  </a:t>
+            </a:r>
+            <a:r>
+              <a:rPr dirty="0" err="1"/>
+              <a:t>Agent架构重构完成：Tool</a:t>
+            </a:r>
+            <a:r>
+              <a:rPr dirty="0"/>
+              <a:t> Registry + Plan Engine + </a:t>
+            </a:r>
+            <a:r>
+              <a:rPr dirty="0" err="1"/>
+              <a:t>Orchestrator，支持失败恢复与状态持久化</a:t>
+            </a:r>
+            <a:endParaRPr dirty="0"/>
           </a:p>
           <a:p>
             <a:pPr>
@@ -5322,7 +5390,16 @@
               </a:defRPr>
             </a:pPr>
             <a:r>
-              <a:t>●  伦理合规整改完成：系统从「临床诊断工具」成功转型为「情绪表达艺术伙伴」</a:t>
+              <a:rPr dirty="0"/>
+              <a:t>●  </a:t>
+            </a:r>
+            <a:r>
+              <a:rPr dirty="0" err="1"/>
+              <a:t>伦理合规整改完成：系统从「临床诊断工具」成功转型为「情绪表达艺术伙伴</a:t>
+            </a:r>
+            <a:r>
+              <a:rPr dirty="0"/>
+              <a:t>」</a:t>
             </a:r>
           </a:p>
         </p:txBody>
@@ -5504,6 +5581,7 @@
                 </a:solidFill>
               </a:defRPr>
             </a:pPr>
+            <a:endParaRPr/>
           </a:p>
           <a:p>
             <a:pPr>
@@ -5626,6 +5704,7 @@
                 </a:solidFill>
               </a:defRPr>
             </a:pPr>
+            <a:endParaRPr/>
           </a:p>
           <a:p>
             <a:pPr>
@@ -6920,7 +6999,7 @@
           <a:lstStyle/>
           <a:p>
             <a:pPr>
-              <a:defRPr sz="1600" i="1" b="1">
+              <a:defRPr sz="1600" b="1" i="1">
                 <a:solidFill>
                   <a:srgbClr val="5A6A7A"/>
                 </a:solidFill>
